--- a/Linux_Audit_Playbook.pptx
+++ b/Linux_Audit_Playbook.pptx
@@ -1218,7 +1218,7 @@
                 <a:ea typeface="Calibri" pitchFamily="34" charset="-122"/>
                 <a:cs typeface="Calibri" pitchFamily="34" charset="-120"/>
               </a:rPr>
-              <a:t>Operators supply the command(s) to run and target inventory/group at launch time — no code changes needed per request.</a:t>
+              <a:t>Operators supply the command(s) to run and a dynamic inventory at launch time — no code changes needed per request.</a:t>
             </a:r>
             <a:endParaRPr lang="en-US" sz="1250" dirty="0"/>
           </a:p>
@@ -1637,7 +1637,7 @@
                 <a:ea typeface="Calibri" pitchFamily="34" charset="-122"/>
                 <a:cs typeface="Calibri" pitchFamily="34" charset="-120"/>
               </a:rPr>
-              <a:t>Operator selects target inventory and enters the audit command(s) in the AAP job survey.</a:t>
+              <a:t>Operator enters a dynamic inventory (passed in as survey input) and the audit command(s) at job launch.</a:t>
             </a:r>
             <a:endParaRPr lang="en-US" sz="1150" dirty="0"/>
           </a:p>
